--- a/proposal/PharmaColdOps_tune.pptx
+++ b/proposal/PharmaColdOps_tune.pptx
@@ -2198,7 +2198,7 @@
                 <a:ea typeface="DM Sans" pitchFamily="34" charset="-122"/>
                 <a:cs typeface="DM Sans" pitchFamily="34" charset="-120"/>
               </a:rPr>
-              <a:t>Accuracy, F1, AUC, PR-AUC, and warning lead time before excursion onset.</a:t>
+              <a:t>Accuracy, F1, ROC-AUC and PR-AUC, against a majority-class baseline.</a:t>
             </a:r>
             <a:endParaRPr lang="en-US" sz="1150" dirty="0"/>
           </a:p>
@@ -2517,7 +2517,7 @@
                 <a:ea typeface="DM Sans" pitchFamily="34" charset="-122"/>
                 <a:cs typeface="DM Sans" pitchFamily="34" charset="-120"/>
               </a:rPr>
-              <a:t>On-time delivery rate, cost and waste reduction vs. greedy and CP-SAT baselines.</a:t>
+              <a:t>On-time delivery rate, cost and waste reduction vs. the greedy baseline.</a:t>
             </a:r>
             <a:endParaRPr lang="en-US" sz="1150" dirty="0"/>
           </a:p>
@@ -4913,7 +4913,7 @@
                 <a:ea typeface="DM Sans" pitchFamily="34" charset="-122"/>
                 <a:cs typeface="DM Sans" pitchFamily="34" charset="-120"/>
               </a:rPr>
-              <a:t> — [Member 3]: VRPTW solver, genetic algorithm, CP-SAT</a:t>
+              <a:t> — [Member 3]: VRPTW solver, OR-Tools routing (extensions optional)</a:t>
             </a:r>
             <a:endParaRPr lang="en-US" sz="1450" dirty="0"/>
           </a:p>
@@ -7487,7 +7487,7 @@
                 <a:ea typeface="DM Sans" pitchFamily="34" charset="-122"/>
                 <a:cs typeface="DM Sans" pitchFamily="34" charset="-120"/>
               </a:rPr>
-              <a:t>Compute MKT and predict excursion risk (30–60 min lead time)</a:t>
+              <a:t>Compute MKT and classify transport-level silent-failure risk</a:t>
             </a:r>
             <a:endParaRPr lang="en-US" sz="1450" dirty="0"/>
           </a:p>
@@ -8193,7 +8193,7 @@
                 <a:ea typeface="DM Sans" pitchFamily="34" charset="-122"/>
                 <a:cs typeface="DM Sans" pitchFamily="34" charset="-120"/>
               </a:rPr>
-              <a:t>Genetic algorithm and OR-Tools CP-SAT solving cold-chain Vehicle Routing with Time Windows (VRPTW).</a:t>
+              <a:t>OR-Tools Routing Solver with guided local search on cold-chain Vehicle Routing with Time Windows (VRPTW).</a:t>
             </a:r>
             <a:endParaRPr lang="en-US" sz="1450" dirty="0"/>
           </a:p>
